--- a/dist/JCHRES_layout_catalog.pptx
+++ b/dist/JCHRES_layout_catalog.pptx
@@ -4352,36 +4352,6 @@
       </p:sp>
       <p:sp>
         <p:nvSpPr>
-          <p:cNvPr id="20" name="Text 3"/>
-          <p:cNvSpPr/>
-          <p:nvPr>
-            <p:ph idx="105" type="body" hasCustomPrompt="1"/>
-          </p:nvPr>
-        </p:nvSpPr>
-        <p:spPr>
-          <a:xfrm>
-            <a:off x="640080" y="1691640"/>
-            <a:ext cx="10908792" cy="4453128"/>
-          </a:xfrm>
-          <a:prstGeom prst="rect">
-            <a:avLst/>
-          </a:prstGeom>
-          <a:noFill/>
-          <a:ln/>
-        </p:spPr>
-        <p:txBody>
-          <a:bodyPr wrap="square" rtlCol="0" anchor="t"/>
-          <a:lstStyle/>
-          <a:p>
-            <a:pPr indent="0" marL="0">
-              <a:buNone/>
-            </a:pPr>
-            <a:endParaRPr lang="en-US" sz="2400" dirty="0"/>
-          </a:p>
-        </p:txBody>
-      </p:sp>
-      <p:sp>
-        <p:nvSpPr>
           <p:cNvPr id="25" name="Slide Number Placeholder 0"/>
           <p:cNvSpPr>
             <a:spLocks noGrp="1"/>
@@ -5280,36 +5250,6 @@
       </p:sp>
       <p:sp>
         <p:nvSpPr>
-          <p:cNvPr id="10" name="Text 3"/>
-          <p:cNvSpPr/>
-          <p:nvPr>
-            <p:ph idx="105" type="body" hasCustomPrompt="1"/>
-          </p:nvPr>
-        </p:nvSpPr>
-        <p:spPr>
-          <a:xfrm>
-            <a:off x="640080" y="1691640"/>
-            <a:ext cx="10908792" cy="4453128"/>
-          </a:xfrm>
-          <a:prstGeom prst="rect">
-            <a:avLst/>
-          </a:prstGeom>
-          <a:noFill/>
-          <a:ln/>
-        </p:spPr>
-        <p:txBody>
-          <a:bodyPr wrap="square" rtlCol="0" anchor="t"/>
-          <a:lstStyle/>
-          <a:p>
-            <a:pPr indent="0" marL="0">
-              <a:buNone/>
-            </a:pPr>
-            <a:endParaRPr lang="en-US" sz="2400" dirty="0"/>
-          </a:p>
-        </p:txBody>
-      </p:sp>
-      <p:sp>
-        <p:nvSpPr>
           <p:cNvPr id="25" name="Slide Number Placeholder 0"/>
           <p:cNvSpPr>
             <a:spLocks noGrp="1"/>
@@ -5958,36 +5898,6 @@
       </p:sp>
       <p:sp>
         <p:nvSpPr>
-          <p:cNvPr id="19" name="Text 3"/>
-          <p:cNvSpPr/>
-          <p:nvPr>
-            <p:ph idx="105" type="body" hasCustomPrompt="1"/>
-          </p:nvPr>
-        </p:nvSpPr>
-        <p:spPr>
-          <a:xfrm>
-            <a:off x="640080" y="1691640"/>
-            <a:ext cx="10908792" cy="4453128"/>
-          </a:xfrm>
-          <a:prstGeom prst="rect">
-            <a:avLst/>
-          </a:prstGeom>
-          <a:noFill/>
-          <a:ln/>
-        </p:spPr>
-        <p:txBody>
-          <a:bodyPr wrap="square" rtlCol="0" anchor="t"/>
-          <a:lstStyle/>
-          <a:p>
-            <a:pPr indent="0" marL="0">
-              <a:buNone/>
-            </a:pPr>
-            <a:endParaRPr lang="en-US" sz="2400" dirty="0"/>
-          </a:p>
-        </p:txBody>
-      </p:sp>
-      <p:sp>
-        <p:nvSpPr>
           <p:cNvPr id="25" name="Slide Number Placeholder 0"/>
           <p:cNvSpPr>
             <a:spLocks noGrp="1"/>
@@ -6744,36 +6654,6 @@
       </p:sp>
       <p:sp>
         <p:nvSpPr>
-          <p:cNvPr id="21" name="Text 3"/>
-          <p:cNvSpPr/>
-          <p:nvPr>
-            <p:ph idx="105" type="body" hasCustomPrompt="1"/>
-          </p:nvPr>
-        </p:nvSpPr>
-        <p:spPr>
-          <a:xfrm>
-            <a:off x="640080" y="1691640"/>
-            <a:ext cx="10908792" cy="4453128"/>
-          </a:xfrm>
-          <a:prstGeom prst="rect">
-            <a:avLst/>
-          </a:prstGeom>
-          <a:noFill/>
-          <a:ln/>
-        </p:spPr>
-        <p:txBody>
-          <a:bodyPr wrap="square" rtlCol="0" anchor="t"/>
-          <a:lstStyle/>
-          <a:p>
-            <a:pPr indent="0" marL="0">
-              <a:buNone/>
-            </a:pPr>
-            <a:endParaRPr lang="en-US" sz="2400" dirty="0"/>
-          </a:p>
-        </p:txBody>
-      </p:sp>
-      <p:sp>
-        <p:nvSpPr>
           <p:cNvPr id="25" name="Slide Number Placeholder 0"/>
           <p:cNvSpPr>
             <a:spLocks noGrp="1"/>
@@ -7103,36 +6983,6 @@
               <a:t>数値の説明</a:t>
             </a:r>
             <a:endParaRPr lang="ja-JP" sz="2400" dirty="0"/>
-          </a:p>
-        </p:txBody>
-      </p:sp>
-      <p:sp>
-        <p:nvSpPr>
-          <p:cNvPr id="9" name="Text 3"/>
-          <p:cNvSpPr/>
-          <p:nvPr>
-            <p:ph idx="105" type="body" hasCustomPrompt="1"/>
-          </p:nvPr>
-        </p:nvSpPr>
-        <p:spPr>
-          <a:xfrm>
-            <a:off x="640080" y="1691640"/>
-            <a:ext cx="10908792" cy="4453128"/>
-          </a:xfrm>
-          <a:prstGeom prst="rect">
-            <a:avLst/>
-          </a:prstGeom>
-          <a:noFill/>
-          <a:ln/>
-        </p:spPr>
-        <p:txBody>
-          <a:bodyPr wrap="square" rtlCol="0" anchor="t"/>
-          <a:lstStyle/>
-          <a:p>
-            <a:pPr indent="0" marL="0">
-              <a:buNone/>
-            </a:pPr>
-            <a:endParaRPr lang="en-US" sz="2400" dirty="0"/>
           </a:p>
         </p:txBody>
       </p:sp>
@@ -8146,36 +7996,6 @@
       </p:graphicFrame>
       <p:sp>
         <p:nvSpPr>
-          <p:cNvPr id="5" name="Text 3"/>
-          <p:cNvSpPr/>
-          <p:nvPr>
-            <p:ph idx="105" type="body" hasCustomPrompt="1"/>
-          </p:nvPr>
-        </p:nvSpPr>
-        <p:spPr>
-          <a:xfrm>
-            <a:off x="640080" y="1691640"/>
-            <a:ext cx="10908792" cy="4453128"/>
-          </a:xfrm>
-          <a:prstGeom prst="rect">
-            <a:avLst/>
-          </a:prstGeom>
-          <a:noFill/>
-          <a:ln/>
-        </p:spPr>
-        <p:txBody>
-          <a:bodyPr wrap="square" rtlCol="0" anchor="t"/>
-          <a:lstStyle/>
-          <a:p>
-            <a:pPr indent="0" marL="0">
-              <a:buNone/>
-            </a:pPr>
-            <a:endParaRPr lang="en-US" sz="2400" dirty="0"/>
-          </a:p>
-        </p:txBody>
-      </p:sp>
-      <p:sp>
-        <p:nvSpPr>
           <p:cNvPr id="25" name="Slide Number Placeholder 0"/>
           <p:cNvSpPr>
             <a:spLocks noGrp="1"/>
